--- a/team/Review/review_1/airport_management.pptx
+++ b/team/Review/review_1/airport_management.pptx
@@ -5,7 +5,7 @@
     <p:sldMasterId id="2147483659" r:id="rId1"/>
   </p:sldMasterIdLst>
   <p:notesMasterIdLst>
-    <p:notesMasterId r:id="rId19"/>
+    <p:notesMasterId r:id="rId17"/>
   </p:notesMasterIdLst>
   <p:sldIdLst>
     <p:sldId id="256" r:id="rId2"/>
@@ -14,17 +14,15 @@
     <p:sldId id="259" r:id="rId5"/>
     <p:sldId id="260" r:id="rId6"/>
     <p:sldId id="261" r:id="rId7"/>
-    <p:sldId id="262" r:id="rId8"/>
-    <p:sldId id="263" r:id="rId9"/>
-    <p:sldId id="264" r:id="rId10"/>
-    <p:sldId id="265" r:id="rId11"/>
-    <p:sldId id="266" r:id="rId12"/>
-    <p:sldId id="267" r:id="rId13"/>
-    <p:sldId id="268" r:id="rId14"/>
-    <p:sldId id="269" r:id="rId15"/>
-    <p:sldId id="270" r:id="rId16"/>
-    <p:sldId id="271" r:id="rId17"/>
-    <p:sldId id="272" r:id="rId18"/>
+    <p:sldId id="263" r:id="rId8"/>
+    <p:sldId id="264" r:id="rId9"/>
+    <p:sldId id="266" r:id="rId10"/>
+    <p:sldId id="267" r:id="rId11"/>
+    <p:sldId id="268" r:id="rId12"/>
+    <p:sldId id="269" r:id="rId13"/>
+    <p:sldId id="270" r:id="rId14"/>
+    <p:sldId id="271" r:id="rId15"/>
+    <p:sldId id="272" r:id="rId16"/>
   </p:sldIdLst>
   <p:sldSz cx="9144000" cy="5143500" type="screen16x9"/>
   <p:notesSz cx="6858000" cy="9144000"/>
@@ -826,7 +824,7 @@
   <p:cSld>
     <p:spTree>
       <p:nvGrpSpPr>
-        <p:cNvPr id="1" name="Shape 113"/>
+        <p:cNvPr id="1" name="Shape 127"/>
         <p:cNvGrpSpPr/>
         <p:nvPr/>
       </p:nvGrpSpPr>
@@ -840,7 +838,7 @@
       </p:grpSpPr>
       <p:sp>
         <p:nvSpPr>
-          <p:cNvPr id="114" name="Google Shape;114;g3cc416a3588_0_48:notes"/>
+          <p:cNvPr id="128" name="Google Shape;128;g3cc416a3588_0_58:notes"/>
           <p:cNvSpPr>
             <a:spLocks noGrp="1" noRot="1" noChangeAspect="1"/>
           </p:cNvSpPr>
@@ -881,7 +879,7 @@
       </p:sp>
       <p:sp>
         <p:nvSpPr>
-          <p:cNvPr id="115" name="Google Shape;115;g3cc416a3588_0_48:notes"/>
+          <p:cNvPr id="129" name="Google Shape;129;g3cc416a3588_0_58:notes"/>
           <p:cNvSpPr txBox="1">
             <a:spLocks noGrp="1"/>
           </p:cNvSpPr>
@@ -926,214 +924,6 @@
 </file>
 
 <file path=ppt/notesSlides/notesSlide11.xml><?xml version="1.0" encoding="utf-8"?>
-<p:notes xmlns:a="http://schemas.openxmlformats.org/drawingml/2006/main" xmlns:r="http://schemas.openxmlformats.org/officeDocument/2006/relationships" xmlns:p="http://schemas.openxmlformats.org/presentationml/2006/main" showMasterSp="0" showMasterPhAnim="0">
-  <p:cSld>
-    <p:spTree>
-      <p:nvGrpSpPr>
-        <p:cNvPr id="1" name="Shape 120"/>
-        <p:cNvGrpSpPr/>
-        <p:nvPr/>
-      </p:nvGrpSpPr>
-      <p:grpSpPr>
-        <a:xfrm>
-          <a:off x="0" y="0"/>
-          <a:ext cx="0" cy="0"/>
-          <a:chOff x="0" y="0"/>
-          <a:chExt cx="0" cy="0"/>
-        </a:xfrm>
-      </p:grpSpPr>
-      <p:sp>
-        <p:nvSpPr>
-          <p:cNvPr id="121" name="Google Shape;121;g3cc416a3588_0_53:notes"/>
-          <p:cNvSpPr>
-            <a:spLocks noGrp="1" noRot="1" noChangeAspect="1"/>
-          </p:cNvSpPr>
-          <p:nvPr>
-            <p:ph type="sldImg" idx="2"/>
-          </p:nvPr>
-        </p:nvSpPr>
-        <p:spPr>
-          <a:xfrm>
-            <a:off x="381300" y="685800"/>
-            <a:ext cx="6096000" cy="3429000"/>
-          </a:xfrm>
-          <a:custGeom>
-            <a:avLst/>
-            <a:gdLst/>
-            <a:ahLst/>
-            <a:cxnLst/>
-            <a:rect l="l" t="t" r="r" b="b"/>
-            <a:pathLst>
-              <a:path w="120000" h="120000" extrusionOk="0">
-                <a:moveTo>
-                  <a:pt x="0" y="0"/>
-                </a:moveTo>
-                <a:lnTo>
-                  <a:pt x="120000" y="0"/>
-                </a:lnTo>
-                <a:lnTo>
-                  <a:pt x="120000" y="120000"/>
-                </a:lnTo>
-                <a:lnTo>
-                  <a:pt x="0" y="120000"/>
-                </a:lnTo>
-                <a:close/>
-              </a:path>
-            </a:pathLst>
-          </a:custGeom>
-        </p:spPr>
-      </p:sp>
-      <p:sp>
-        <p:nvSpPr>
-          <p:cNvPr id="122" name="Google Shape;122;g3cc416a3588_0_53:notes"/>
-          <p:cNvSpPr txBox="1">
-            <a:spLocks noGrp="1"/>
-          </p:cNvSpPr>
-          <p:nvPr>
-            <p:ph type="body" idx="1"/>
-          </p:nvPr>
-        </p:nvSpPr>
-        <p:spPr>
-          <a:xfrm>
-            <a:off x="685800" y="4343400"/>
-            <a:ext cx="5486400" cy="4114800"/>
-          </a:xfrm>
-          <a:prstGeom prst="rect">
-            <a:avLst/>
-          </a:prstGeom>
-        </p:spPr>
-        <p:txBody>
-          <a:bodyPr spcFirstLastPara="1" wrap="square" lIns="91425" tIns="91425" rIns="91425" bIns="91425" anchor="t" anchorCtr="0">
-            <a:noAutofit/>
-          </a:bodyPr>
-          <a:lstStyle/>
-          <a:p>
-            <a:pPr marL="0" lvl="0" indent="0" algn="l" rtl="0">
-              <a:spcBef>
-                <a:spcPts val="0"/>
-              </a:spcBef>
-              <a:spcAft>
-                <a:spcPts val="0"/>
-              </a:spcAft>
-              <a:buNone/>
-            </a:pPr>
-            <a:endParaRPr/>
-          </a:p>
-        </p:txBody>
-      </p:sp>
-    </p:spTree>
-  </p:cSld>
-  <p:clrMapOvr>
-    <a:masterClrMapping/>
-  </p:clrMapOvr>
-</p:notes>
-</file>
-
-<file path=ppt/notesSlides/notesSlide12.xml><?xml version="1.0" encoding="utf-8"?>
-<p:notes xmlns:a="http://schemas.openxmlformats.org/drawingml/2006/main" xmlns:r="http://schemas.openxmlformats.org/officeDocument/2006/relationships" xmlns:p="http://schemas.openxmlformats.org/presentationml/2006/main" showMasterSp="0" showMasterPhAnim="0">
-  <p:cSld>
-    <p:spTree>
-      <p:nvGrpSpPr>
-        <p:cNvPr id="1" name="Shape 127"/>
-        <p:cNvGrpSpPr/>
-        <p:nvPr/>
-      </p:nvGrpSpPr>
-      <p:grpSpPr>
-        <a:xfrm>
-          <a:off x="0" y="0"/>
-          <a:ext cx="0" cy="0"/>
-          <a:chOff x="0" y="0"/>
-          <a:chExt cx="0" cy="0"/>
-        </a:xfrm>
-      </p:grpSpPr>
-      <p:sp>
-        <p:nvSpPr>
-          <p:cNvPr id="128" name="Google Shape;128;g3cc416a3588_0_58:notes"/>
-          <p:cNvSpPr>
-            <a:spLocks noGrp="1" noRot="1" noChangeAspect="1"/>
-          </p:cNvSpPr>
-          <p:nvPr>
-            <p:ph type="sldImg" idx="2"/>
-          </p:nvPr>
-        </p:nvSpPr>
-        <p:spPr>
-          <a:xfrm>
-            <a:off x="381300" y="685800"/>
-            <a:ext cx="6096000" cy="3429000"/>
-          </a:xfrm>
-          <a:custGeom>
-            <a:avLst/>
-            <a:gdLst/>
-            <a:ahLst/>
-            <a:cxnLst/>
-            <a:rect l="l" t="t" r="r" b="b"/>
-            <a:pathLst>
-              <a:path w="120000" h="120000" extrusionOk="0">
-                <a:moveTo>
-                  <a:pt x="0" y="0"/>
-                </a:moveTo>
-                <a:lnTo>
-                  <a:pt x="120000" y="0"/>
-                </a:lnTo>
-                <a:lnTo>
-                  <a:pt x="120000" y="120000"/>
-                </a:lnTo>
-                <a:lnTo>
-                  <a:pt x="0" y="120000"/>
-                </a:lnTo>
-                <a:close/>
-              </a:path>
-            </a:pathLst>
-          </a:custGeom>
-        </p:spPr>
-      </p:sp>
-      <p:sp>
-        <p:nvSpPr>
-          <p:cNvPr id="129" name="Google Shape;129;g3cc416a3588_0_58:notes"/>
-          <p:cNvSpPr txBox="1">
-            <a:spLocks noGrp="1"/>
-          </p:cNvSpPr>
-          <p:nvPr>
-            <p:ph type="body" idx="1"/>
-          </p:nvPr>
-        </p:nvSpPr>
-        <p:spPr>
-          <a:xfrm>
-            <a:off x="685800" y="4343400"/>
-            <a:ext cx="5486400" cy="4114800"/>
-          </a:xfrm>
-          <a:prstGeom prst="rect">
-            <a:avLst/>
-          </a:prstGeom>
-        </p:spPr>
-        <p:txBody>
-          <a:bodyPr spcFirstLastPara="1" wrap="square" lIns="91425" tIns="91425" rIns="91425" bIns="91425" anchor="t" anchorCtr="0">
-            <a:noAutofit/>
-          </a:bodyPr>
-          <a:lstStyle/>
-          <a:p>
-            <a:pPr marL="0" lvl="0" indent="0" algn="l" rtl="0">
-              <a:spcBef>
-                <a:spcPts val="0"/>
-              </a:spcBef>
-              <a:spcAft>
-                <a:spcPts val="0"/>
-              </a:spcAft>
-              <a:buNone/>
-            </a:pPr>
-            <a:endParaRPr/>
-          </a:p>
-        </p:txBody>
-      </p:sp>
-    </p:spTree>
-  </p:cSld>
-  <p:clrMapOvr>
-    <a:masterClrMapping/>
-  </p:clrMapOvr>
-</p:notes>
-</file>
-
-<file path=ppt/notesSlides/notesSlide13.xml><?xml version="1.0" encoding="utf-8"?>
 <p:notes xmlns:a="http://schemas.openxmlformats.org/drawingml/2006/main" xmlns:r="http://schemas.openxmlformats.org/officeDocument/2006/relationships" xmlns:p="http://schemas.openxmlformats.org/presentationml/2006/main" showMasterSp="0" showMasterPhAnim="0">
   <p:cSld>
     <p:spTree>
@@ -1237,7 +1027,7 @@
 </p:notes>
 </file>
 
-<file path=ppt/notesSlides/notesSlide14.xml><?xml version="1.0" encoding="utf-8"?>
+<file path=ppt/notesSlides/notesSlide12.xml><?xml version="1.0" encoding="utf-8"?>
 <p:notes xmlns:a="http://schemas.openxmlformats.org/drawingml/2006/main" xmlns:r="http://schemas.openxmlformats.org/officeDocument/2006/relationships" xmlns:p="http://schemas.openxmlformats.org/presentationml/2006/main" showMasterSp="0" showMasterPhAnim="0">
   <p:cSld>
     <p:spTree>
@@ -1341,7 +1131,7 @@
 </p:notes>
 </file>
 
-<file path=ppt/notesSlides/notesSlide15.xml><?xml version="1.0" encoding="utf-8"?>
+<file path=ppt/notesSlides/notesSlide13.xml><?xml version="1.0" encoding="utf-8"?>
 <p:notes xmlns:a="http://schemas.openxmlformats.org/drawingml/2006/main" xmlns:r="http://schemas.openxmlformats.org/officeDocument/2006/relationships" xmlns:p="http://schemas.openxmlformats.org/presentationml/2006/main" showMasterSp="0" showMasterPhAnim="0">
   <p:cSld>
     <p:spTree>
@@ -1445,7 +1235,7 @@
 </p:notes>
 </file>
 
-<file path=ppt/notesSlides/notesSlide16.xml><?xml version="1.0" encoding="utf-8"?>
+<file path=ppt/notesSlides/notesSlide14.xml><?xml version="1.0" encoding="utf-8"?>
 <p:notes xmlns:a="http://schemas.openxmlformats.org/drawingml/2006/main" xmlns:r="http://schemas.openxmlformats.org/officeDocument/2006/relationships" xmlns:p="http://schemas.openxmlformats.org/presentationml/2006/main" showMasterSp="0" showMasterPhAnim="0">
   <p:cSld>
     <p:spTree>
@@ -1578,7 +1368,7 @@
         </p:nvSpPr>
         <p:spPr>
           <a:xfrm>
-            <a:off x="381300" y="685800"/>
+            <a:off x="381000" y="685800"/>
             <a:ext cx="6096000" cy="3429000"/>
           </a:xfrm>
           <a:custGeom>
@@ -1682,7 +1472,7 @@
         </p:nvSpPr>
         <p:spPr>
           <a:xfrm>
-            <a:off x="381300" y="685800"/>
+            <a:off x="381000" y="685800"/>
             <a:ext cx="6096000" cy="3429000"/>
           </a:xfrm>
           <a:custGeom>
@@ -2074,7 +1864,7 @@
   <p:cSld>
     <p:spTree>
       <p:nvGrpSpPr>
-        <p:cNvPr id="1" name="Shape 92"/>
+        <p:cNvPr id="1" name="Shape 99"/>
         <p:cNvGrpSpPr/>
         <p:nvPr/>
       </p:nvGrpSpPr>
@@ -2088,7 +1878,7 @@
       </p:grpSpPr>
       <p:sp>
         <p:nvSpPr>
-          <p:cNvPr id="93" name="Google Shape;93;g3cc416a3588_0_26:notes"/>
+          <p:cNvPr id="100" name="Google Shape;100;g3cc416a3588_0_31:notes"/>
           <p:cNvSpPr>
             <a:spLocks noGrp="1" noRot="1" noChangeAspect="1"/>
           </p:cNvSpPr>
@@ -2098,7 +1888,7 @@
         </p:nvSpPr>
         <p:spPr>
           <a:xfrm>
-            <a:off x="381000" y="685800"/>
+            <a:off x="381300" y="685800"/>
             <a:ext cx="6096000" cy="3429000"/>
           </a:xfrm>
           <a:custGeom>
@@ -2129,7 +1919,7 @@
       </p:sp>
       <p:sp>
         <p:nvSpPr>
-          <p:cNvPr id="94" name="Google Shape;94;g3cc416a3588_0_26:notes"/>
+          <p:cNvPr id="101" name="Google Shape;101;g3cc416a3588_0_31:notes"/>
           <p:cNvSpPr txBox="1">
             <a:spLocks noGrp="1"/>
           </p:cNvSpPr>
@@ -2174,110 +1964,6 @@
 </file>
 
 <file path=ppt/notesSlides/notesSlide8.xml><?xml version="1.0" encoding="utf-8"?>
-<p:notes xmlns:a="http://schemas.openxmlformats.org/drawingml/2006/main" xmlns:r="http://schemas.openxmlformats.org/officeDocument/2006/relationships" xmlns:p="http://schemas.openxmlformats.org/presentationml/2006/main" showMasterSp="0" showMasterPhAnim="0">
-  <p:cSld>
-    <p:spTree>
-      <p:nvGrpSpPr>
-        <p:cNvPr id="1" name="Shape 99"/>
-        <p:cNvGrpSpPr/>
-        <p:nvPr/>
-      </p:nvGrpSpPr>
-      <p:grpSpPr>
-        <a:xfrm>
-          <a:off x="0" y="0"/>
-          <a:ext cx="0" cy="0"/>
-          <a:chOff x="0" y="0"/>
-          <a:chExt cx="0" cy="0"/>
-        </a:xfrm>
-      </p:grpSpPr>
-      <p:sp>
-        <p:nvSpPr>
-          <p:cNvPr id="100" name="Google Shape;100;g3cc416a3588_0_31:notes"/>
-          <p:cNvSpPr>
-            <a:spLocks noGrp="1" noRot="1" noChangeAspect="1"/>
-          </p:cNvSpPr>
-          <p:nvPr>
-            <p:ph type="sldImg" idx="2"/>
-          </p:nvPr>
-        </p:nvSpPr>
-        <p:spPr>
-          <a:xfrm>
-            <a:off x="381300" y="685800"/>
-            <a:ext cx="6096000" cy="3429000"/>
-          </a:xfrm>
-          <a:custGeom>
-            <a:avLst/>
-            <a:gdLst/>
-            <a:ahLst/>
-            <a:cxnLst/>
-            <a:rect l="l" t="t" r="r" b="b"/>
-            <a:pathLst>
-              <a:path w="120000" h="120000" extrusionOk="0">
-                <a:moveTo>
-                  <a:pt x="0" y="0"/>
-                </a:moveTo>
-                <a:lnTo>
-                  <a:pt x="120000" y="0"/>
-                </a:lnTo>
-                <a:lnTo>
-                  <a:pt x="120000" y="120000"/>
-                </a:lnTo>
-                <a:lnTo>
-                  <a:pt x="0" y="120000"/>
-                </a:lnTo>
-                <a:close/>
-              </a:path>
-            </a:pathLst>
-          </a:custGeom>
-        </p:spPr>
-      </p:sp>
-      <p:sp>
-        <p:nvSpPr>
-          <p:cNvPr id="101" name="Google Shape;101;g3cc416a3588_0_31:notes"/>
-          <p:cNvSpPr txBox="1">
-            <a:spLocks noGrp="1"/>
-          </p:cNvSpPr>
-          <p:nvPr>
-            <p:ph type="body" idx="1"/>
-          </p:nvPr>
-        </p:nvSpPr>
-        <p:spPr>
-          <a:xfrm>
-            <a:off x="685800" y="4343400"/>
-            <a:ext cx="5486400" cy="4114800"/>
-          </a:xfrm>
-          <a:prstGeom prst="rect">
-            <a:avLst/>
-          </a:prstGeom>
-        </p:spPr>
-        <p:txBody>
-          <a:bodyPr spcFirstLastPara="1" wrap="square" lIns="91425" tIns="91425" rIns="91425" bIns="91425" anchor="t" anchorCtr="0">
-            <a:noAutofit/>
-          </a:bodyPr>
-          <a:lstStyle/>
-          <a:p>
-            <a:pPr marL="0" lvl="0" indent="0" algn="l" rtl="0">
-              <a:spcBef>
-                <a:spcPts val="0"/>
-              </a:spcBef>
-              <a:spcAft>
-                <a:spcPts val="0"/>
-              </a:spcAft>
-              <a:buNone/>
-            </a:pPr>
-            <a:endParaRPr/>
-          </a:p>
-        </p:txBody>
-      </p:sp>
-    </p:spTree>
-  </p:cSld>
-  <p:clrMapOvr>
-    <a:masterClrMapping/>
-  </p:clrMapOvr>
-</p:notes>
-</file>
-
-<file path=ppt/notesSlides/notesSlide9.xml><?xml version="1.0" encoding="utf-8"?>
 <p:notes xmlns:a="http://schemas.openxmlformats.org/drawingml/2006/main" xmlns:r="http://schemas.openxmlformats.org/officeDocument/2006/relationships" xmlns:p="http://schemas.openxmlformats.org/presentationml/2006/main" showMasterSp="0" showMasterPhAnim="0">
   <p:cSld>
     <p:spTree>
@@ -2338,6 +2024,110 @@
       <p:sp>
         <p:nvSpPr>
           <p:cNvPr id="108" name="Google Shape;108;g3cc416a3588_0_43:notes"/>
+          <p:cNvSpPr txBox="1">
+            <a:spLocks noGrp="1"/>
+          </p:cNvSpPr>
+          <p:nvPr>
+            <p:ph type="body" idx="1"/>
+          </p:nvPr>
+        </p:nvSpPr>
+        <p:spPr>
+          <a:xfrm>
+            <a:off x="685800" y="4343400"/>
+            <a:ext cx="5486400" cy="4114800"/>
+          </a:xfrm>
+          <a:prstGeom prst="rect">
+            <a:avLst/>
+          </a:prstGeom>
+        </p:spPr>
+        <p:txBody>
+          <a:bodyPr spcFirstLastPara="1" wrap="square" lIns="91425" tIns="91425" rIns="91425" bIns="91425" anchor="t" anchorCtr="0">
+            <a:noAutofit/>
+          </a:bodyPr>
+          <a:lstStyle/>
+          <a:p>
+            <a:pPr marL="0" lvl="0" indent="0" algn="l" rtl="0">
+              <a:spcBef>
+                <a:spcPts val="0"/>
+              </a:spcBef>
+              <a:spcAft>
+                <a:spcPts val="0"/>
+              </a:spcAft>
+              <a:buNone/>
+            </a:pPr>
+            <a:endParaRPr/>
+          </a:p>
+        </p:txBody>
+      </p:sp>
+    </p:spTree>
+  </p:cSld>
+  <p:clrMapOvr>
+    <a:masterClrMapping/>
+  </p:clrMapOvr>
+</p:notes>
+</file>
+
+<file path=ppt/notesSlides/notesSlide9.xml><?xml version="1.0" encoding="utf-8"?>
+<p:notes xmlns:a="http://schemas.openxmlformats.org/drawingml/2006/main" xmlns:r="http://schemas.openxmlformats.org/officeDocument/2006/relationships" xmlns:p="http://schemas.openxmlformats.org/presentationml/2006/main" showMasterSp="0" showMasterPhAnim="0">
+  <p:cSld>
+    <p:spTree>
+      <p:nvGrpSpPr>
+        <p:cNvPr id="1" name="Shape 120"/>
+        <p:cNvGrpSpPr/>
+        <p:nvPr/>
+      </p:nvGrpSpPr>
+      <p:grpSpPr>
+        <a:xfrm>
+          <a:off x="0" y="0"/>
+          <a:ext cx="0" cy="0"/>
+          <a:chOff x="0" y="0"/>
+          <a:chExt cx="0" cy="0"/>
+        </a:xfrm>
+      </p:grpSpPr>
+      <p:sp>
+        <p:nvSpPr>
+          <p:cNvPr id="121" name="Google Shape;121;g3cc416a3588_0_53:notes"/>
+          <p:cNvSpPr>
+            <a:spLocks noGrp="1" noRot="1" noChangeAspect="1"/>
+          </p:cNvSpPr>
+          <p:nvPr>
+            <p:ph type="sldImg" idx="2"/>
+          </p:nvPr>
+        </p:nvSpPr>
+        <p:spPr>
+          <a:xfrm>
+            <a:off x="381300" y="685800"/>
+            <a:ext cx="6096000" cy="3429000"/>
+          </a:xfrm>
+          <a:custGeom>
+            <a:avLst/>
+            <a:gdLst/>
+            <a:ahLst/>
+            <a:cxnLst/>
+            <a:rect l="l" t="t" r="r" b="b"/>
+            <a:pathLst>
+              <a:path w="120000" h="120000" extrusionOk="0">
+                <a:moveTo>
+                  <a:pt x="0" y="0"/>
+                </a:moveTo>
+                <a:lnTo>
+                  <a:pt x="120000" y="0"/>
+                </a:lnTo>
+                <a:lnTo>
+                  <a:pt x="120000" y="120000"/>
+                </a:lnTo>
+                <a:lnTo>
+                  <a:pt x="0" y="120000"/>
+                </a:lnTo>
+                <a:close/>
+              </a:path>
+            </a:pathLst>
+          </a:custGeom>
+        </p:spPr>
+      </p:sp>
+      <p:sp>
+        <p:nvSpPr>
+          <p:cNvPr id="122" name="Google Shape;122;g3cc416a3588_0_53:notes"/>
           <p:cNvSpPr txBox="1">
             <a:spLocks noGrp="1"/>
           </p:cNvSpPr>
@@ -7420,7 +7210,7 @@
   <p:cSld>
     <p:spTree>
       <p:nvGrpSpPr>
-        <p:cNvPr id="1" name="Shape 116"/>
+        <p:cNvPr id="1" name="Shape 130"/>
         <p:cNvGrpSpPr/>
         <p:nvPr/>
       </p:nvGrpSpPr>
@@ -7434,7 +7224,7 @@
       </p:grpSpPr>
       <p:sp>
         <p:nvSpPr>
-          <p:cNvPr id="117" name="Google Shape;117;p22"/>
+          <p:cNvPr id="131" name="Google Shape;131;p24"/>
           <p:cNvSpPr txBox="1">
             <a:spLocks noGrp="1"/>
           </p:cNvSpPr>
@@ -7472,7 +7262,7 @@
       </p:sp>
       <p:sp>
         <p:nvSpPr>
-          <p:cNvPr id="118" name="Google Shape;118;p22"/>
+          <p:cNvPr id="132" name="Google Shape;132;p24"/>
           <p:cNvSpPr txBox="1">
             <a:spLocks noGrp="1"/>
           </p:cNvSpPr>
@@ -7510,7 +7300,7 @@
       </p:sp>
       <p:pic>
         <p:nvPicPr>
-          <p:cNvPr id="119" name="Google Shape;119;p22"/>
+          <p:cNvPr id="133" name="Google Shape;133;p24"/>
           <p:cNvPicPr preferRelativeResize="0"/>
           <p:nvPr/>
         </p:nvPicPr>
@@ -7524,8 +7314,8 @@
         </p:blipFill>
         <p:spPr>
           <a:xfrm>
-            <a:off x="0" y="-59175"/>
-            <a:ext cx="9143999" cy="5202675"/>
+            <a:off x="0" y="0"/>
+            <a:ext cx="9144000" cy="5143500"/>
           </a:xfrm>
           <a:prstGeom prst="rect">
             <a:avLst/>
@@ -7561,7 +7351,7 @@
   <p:cSld>
     <p:spTree>
       <p:nvGrpSpPr>
-        <p:cNvPr id="1" name="Shape 123"/>
+        <p:cNvPr id="1" name="Shape 137"/>
         <p:cNvGrpSpPr/>
         <p:nvPr/>
       </p:nvGrpSpPr>
@@ -7575,7 +7365,7 @@
       </p:grpSpPr>
       <p:sp>
         <p:nvSpPr>
-          <p:cNvPr id="124" name="Google Shape;124;p23"/>
+          <p:cNvPr id="138" name="Google Shape;138;p25"/>
           <p:cNvSpPr txBox="1">
             <a:spLocks noGrp="1"/>
           </p:cNvSpPr>
@@ -7613,7 +7403,7 @@
       </p:sp>
       <p:sp>
         <p:nvSpPr>
-          <p:cNvPr id="125" name="Google Shape;125;p23"/>
+          <p:cNvPr id="139" name="Google Shape;139;p25"/>
           <p:cNvSpPr txBox="1">
             <a:spLocks noGrp="1"/>
           </p:cNvSpPr>
@@ -7651,7 +7441,7 @@
       </p:sp>
       <p:pic>
         <p:nvPicPr>
-          <p:cNvPr id="126" name="Google Shape;126;p23"/>
+          <p:cNvPr id="140" name="Google Shape;140;p25"/>
           <p:cNvPicPr preferRelativeResize="0"/>
           <p:nvPr/>
         </p:nvPicPr>
@@ -7665,8 +7455,8 @@
         </p:blipFill>
         <p:spPr>
           <a:xfrm>
-            <a:off x="0" y="-84725"/>
-            <a:ext cx="9144001" cy="5228225"/>
+            <a:off x="0" y="-44300"/>
+            <a:ext cx="9143999" cy="5187801"/>
           </a:xfrm>
           <a:prstGeom prst="rect">
             <a:avLst/>
@@ -7698,288 +7488,6 @@
 </file>
 
 <file path=ppt/slides/slide12.xml><?xml version="1.0" encoding="utf-8"?>
-<p:sld xmlns:a="http://schemas.openxmlformats.org/drawingml/2006/main" xmlns:r="http://schemas.openxmlformats.org/officeDocument/2006/relationships" xmlns:p="http://schemas.openxmlformats.org/presentationml/2006/main">
-  <p:cSld>
-    <p:spTree>
-      <p:nvGrpSpPr>
-        <p:cNvPr id="1" name="Shape 130"/>
-        <p:cNvGrpSpPr/>
-        <p:nvPr/>
-      </p:nvGrpSpPr>
-      <p:grpSpPr>
-        <a:xfrm>
-          <a:off x="0" y="0"/>
-          <a:ext cx="0" cy="0"/>
-          <a:chOff x="0" y="0"/>
-          <a:chExt cx="0" cy="0"/>
-        </a:xfrm>
-      </p:grpSpPr>
-      <p:sp>
-        <p:nvSpPr>
-          <p:cNvPr id="131" name="Google Shape;131;p24"/>
-          <p:cNvSpPr txBox="1">
-            <a:spLocks noGrp="1"/>
-          </p:cNvSpPr>
-          <p:nvPr>
-            <p:ph type="title"/>
-          </p:nvPr>
-        </p:nvSpPr>
-        <p:spPr>
-          <a:xfrm>
-            <a:off x="311700" y="445025"/>
-            <a:ext cx="8520600" cy="572700"/>
-          </a:xfrm>
-          <a:prstGeom prst="rect">
-            <a:avLst/>
-          </a:prstGeom>
-        </p:spPr>
-        <p:txBody>
-          <a:bodyPr spcFirstLastPara="1" wrap="square" lIns="91425" tIns="91425" rIns="91425" bIns="91425" anchor="t" anchorCtr="0">
-            <a:normAutofit fontScale="90000"/>
-          </a:bodyPr>
-          <a:lstStyle/>
-          <a:p>
-            <a:pPr marL="0" lvl="0" indent="0" algn="l" rtl="0">
-              <a:spcBef>
-                <a:spcPts val="0"/>
-              </a:spcBef>
-              <a:spcAft>
-                <a:spcPts val="0"/>
-              </a:spcAft>
-              <a:buNone/>
-            </a:pPr>
-            <a:endParaRPr/>
-          </a:p>
-        </p:txBody>
-      </p:sp>
-      <p:sp>
-        <p:nvSpPr>
-          <p:cNvPr id="132" name="Google Shape;132;p24"/>
-          <p:cNvSpPr txBox="1">
-            <a:spLocks noGrp="1"/>
-          </p:cNvSpPr>
-          <p:nvPr>
-            <p:ph type="body" idx="1"/>
-          </p:nvPr>
-        </p:nvSpPr>
-        <p:spPr>
-          <a:xfrm>
-            <a:off x="311700" y="1152475"/>
-            <a:ext cx="8520600" cy="3416400"/>
-          </a:xfrm>
-          <a:prstGeom prst="rect">
-            <a:avLst/>
-          </a:prstGeom>
-        </p:spPr>
-        <p:txBody>
-          <a:bodyPr spcFirstLastPara="1" wrap="square" lIns="91425" tIns="91425" rIns="91425" bIns="91425" anchor="t" anchorCtr="0">
-            <a:normAutofit/>
-          </a:bodyPr>
-          <a:lstStyle/>
-          <a:p>
-            <a:pPr marL="0" lvl="0" indent="0" algn="l" rtl="0">
-              <a:spcBef>
-                <a:spcPts val="0"/>
-              </a:spcBef>
-              <a:spcAft>
-                <a:spcPts val="1200"/>
-              </a:spcAft>
-              <a:buNone/>
-            </a:pPr>
-            <a:endParaRPr/>
-          </a:p>
-        </p:txBody>
-      </p:sp>
-      <p:pic>
-        <p:nvPicPr>
-          <p:cNvPr id="133" name="Google Shape;133;p24"/>
-          <p:cNvPicPr preferRelativeResize="0"/>
-          <p:nvPr/>
-        </p:nvPicPr>
-        <p:blipFill>
-          <a:blip r:embed="rId3">
-            <a:alphaModFix/>
-          </a:blip>
-          <a:stretch>
-            <a:fillRect/>
-          </a:stretch>
-        </p:blipFill>
-        <p:spPr>
-          <a:xfrm>
-            <a:off x="0" y="0"/>
-            <a:ext cx="9144000" cy="5143500"/>
-          </a:xfrm>
-          <a:prstGeom prst="rect">
-            <a:avLst/>
-          </a:prstGeom>
-          <a:noFill/>
-          <a:ln>
-            <a:noFill/>
-          </a:ln>
-        </p:spPr>
-      </p:pic>
-    </p:spTree>
-  </p:cSld>
-  <p:clrMapOvr>
-    <a:masterClrMapping/>
-  </p:clrMapOvr>
-  <mc:AlternateContent xmlns:mc="http://schemas.openxmlformats.org/markup-compatibility/2006">
-    <mc:Choice xmlns:p14="http://schemas.microsoft.com/office/powerpoint/2010/main" Requires="p14">
-      <p:transition spd="med" p14:dur="700">
-        <p:fade/>
-      </p:transition>
-    </mc:Choice>
-    <mc:Fallback>
-      <p:transition spd="med">
-        <p:fade/>
-      </p:transition>
-    </mc:Fallback>
-  </mc:AlternateContent>
-</p:sld>
-</file>
-
-<file path=ppt/slides/slide13.xml><?xml version="1.0" encoding="utf-8"?>
-<p:sld xmlns:a="http://schemas.openxmlformats.org/drawingml/2006/main" xmlns:r="http://schemas.openxmlformats.org/officeDocument/2006/relationships" xmlns:p="http://schemas.openxmlformats.org/presentationml/2006/main">
-  <p:cSld>
-    <p:spTree>
-      <p:nvGrpSpPr>
-        <p:cNvPr id="1" name="Shape 137"/>
-        <p:cNvGrpSpPr/>
-        <p:nvPr/>
-      </p:nvGrpSpPr>
-      <p:grpSpPr>
-        <a:xfrm>
-          <a:off x="0" y="0"/>
-          <a:ext cx="0" cy="0"/>
-          <a:chOff x="0" y="0"/>
-          <a:chExt cx="0" cy="0"/>
-        </a:xfrm>
-      </p:grpSpPr>
-      <p:sp>
-        <p:nvSpPr>
-          <p:cNvPr id="138" name="Google Shape;138;p25"/>
-          <p:cNvSpPr txBox="1">
-            <a:spLocks noGrp="1"/>
-          </p:cNvSpPr>
-          <p:nvPr>
-            <p:ph type="title"/>
-          </p:nvPr>
-        </p:nvSpPr>
-        <p:spPr>
-          <a:xfrm>
-            <a:off x="311700" y="445025"/>
-            <a:ext cx="8520600" cy="572700"/>
-          </a:xfrm>
-          <a:prstGeom prst="rect">
-            <a:avLst/>
-          </a:prstGeom>
-        </p:spPr>
-        <p:txBody>
-          <a:bodyPr spcFirstLastPara="1" wrap="square" lIns="91425" tIns="91425" rIns="91425" bIns="91425" anchor="t" anchorCtr="0">
-            <a:normAutofit fontScale="90000"/>
-          </a:bodyPr>
-          <a:lstStyle/>
-          <a:p>
-            <a:pPr marL="0" lvl="0" indent="0" algn="l" rtl="0">
-              <a:spcBef>
-                <a:spcPts val="0"/>
-              </a:spcBef>
-              <a:spcAft>
-                <a:spcPts val="0"/>
-              </a:spcAft>
-              <a:buNone/>
-            </a:pPr>
-            <a:endParaRPr/>
-          </a:p>
-        </p:txBody>
-      </p:sp>
-      <p:sp>
-        <p:nvSpPr>
-          <p:cNvPr id="139" name="Google Shape;139;p25"/>
-          <p:cNvSpPr txBox="1">
-            <a:spLocks noGrp="1"/>
-          </p:cNvSpPr>
-          <p:nvPr>
-            <p:ph type="body" idx="1"/>
-          </p:nvPr>
-        </p:nvSpPr>
-        <p:spPr>
-          <a:xfrm>
-            <a:off x="311700" y="1152475"/>
-            <a:ext cx="8520600" cy="3416400"/>
-          </a:xfrm>
-          <a:prstGeom prst="rect">
-            <a:avLst/>
-          </a:prstGeom>
-        </p:spPr>
-        <p:txBody>
-          <a:bodyPr spcFirstLastPara="1" wrap="square" lIns="91425" tIns="91425" rIns="91425" bIns="91425" anchor="t" anchorCtr="0">
-            <a:normAutofit/>
-          </a:bodyPr>
-          <a:lstStyle/>
-          <a:p>
-            <a:pPr marL="0" lvl="0" indent="0" algn="l" rtl="0">
-              <a:spcBef>
-                <a:spcPts val="0"/>
-              </a:spcBef>
-              <a:spcAft>
-                <a:spcPts val="1200"/>
-              </a:spcAft>
-              <a:buNone/>
-            </a:pPr>
-            <a:endParaRPr/>
-          </a:p>
-        </p:txBody>
-      </p:sp>
-      <p:pic>
-        <p:nvPicPr>
-          <p:cNvPr id="140" name="Google Shape;140;p25"/>
-          <p:cNvPicPr preferRelativeResize="0"/>
-          <p:nvPr/>
-        </p:nvPicPr>
-        <p:blipFill>
-          <a:blip r:embed="rId3">
-            <a:alphaModFix/>
-          </a:blip>
-          <a:stretch>
-            <a:fillRect/>
-          </a:stretch>
-        </p:blipFill>
-        <p:spPr>
-          <a:xfrm>
-            <a:off x="0" y="-44300"/>
-            <a:ext cx="9143999" cy="5187801"/>
-          </a:xfrm>
-          <a:prstGeom prst="rect">
-            <a:avLst/>
-          </a:prstGeom>
-          <a:noFill/>
-          <a:ln>
-            <a:noFill/>
-          </a:ln>
-        </p:spPr>
-      </p:pic>
-    </p:spTree>
-  </p:cSld>
-  <p:clrMapOvr>
-    <a:masterClrMapping/>
-  </p:clrMapOvr>
-  <mc:AlternateContent xmlns:mc="http://schemas.openxmlformats.org/markup-compatibility/2006">
-    <mc:Choice xmlns:p14="http://schemas.microsoft.com/office/powerpoint/2010/main" Requires="p14">
-      <p:transition spd="med" p14:dur="700">
-        <p:fade/>
-      </p:transition>
-    </mc:Choice>
-    <mc:Fallback>
-      <p:transition spd="med">
-        <p:fade/>
-      </p:transition>
-    </mc:Fallback>
-  </mc:AlternateContent>
-</p:sld>
-</file>
-
-<file path=ppt/slides/slide14.xml><?xml version="1.0" encoding="utf-8"?>
 <p:sld xmlns:a="http://schemas.openxmlformats.org/drawingml/2006/main" xmlns:r="http://schemas.openxmlformats.org/officeDocument/2006/relationships" xmlns:p="http://schemas.openxmlformats.org/presentationml/2006/main">
   <p:cSld>
     <p:bg>
@@ -8128,7 +7636,7 @@
 </p:sld>
 </file>
 
-<file path=ppt/slides/slide15.xml><?xml version="1.0" encoding="utf-8"?>
+<file path=ppt/slides/slide13.xml><?xml version="1.0" encoding="utf-8"?>
 <p:sld xmlns:a="http://schemas.openxmlformats.org/drawingml/2006/main" xmlns:r="http://schemas.openxmlformats.org/officeDocument/2006/relationships" xmlns:p="http://schemas.openxmlformats.org/presentationml/2006/main">
   <p:cSld>
     <p:spTree>
@@ -8269,7 +7777,7 @@
 </p:sld>
 </file>
 
-<file path=ppt/slides/slide16.xml><?xml version="1.0" encoding="utf-8"?>
+<file path=ppt/slides/slide14.xml><?xml version="1.0" encoding="utf-8"?>
 <p:sld xmlns:a="http://schemas.openxmlformats.org/drawingml/2006/main" xmlns:r="http://schemas.openxmlformats.org/officeDocument/2006/relationships" xmlns:p="http://schemas.openxmlformats.org/presentationml/2006/main">
   <p:cSld>
     <p:bg>
@@ -8411,7 +7919,7 @@
 </p:sld>
 </file>
 
-<file path=ppt/slides/slide17.xml><?xml version="1.0" encoding="utf-8"?>
+<file path=ppt/slides/slide15.xml><?xml version="1.0" encoding="utf-8"?>
 <p:sld xmlns:a="http://schemas.openxmlformats.org/drawingml/2006/main" xmlns:r="http://schemas.openxmlformats.org/officeDocument/2006/relationships" xmlns:p="http://schemas.openxmlformats.org/presentationml/2006/main">
   <p:cSld>
     <p:spTree>
@@ -8502,7 +8010,7 @@
         </p:blipFill>
         <p:spPr>
           <a:xfrm>
-            <a:off x="82550" y="44975"/>
+            <a:off x="101600" y="44975"/>
             <a:ext cx="9144000" cy="5143500"/>
           </a:xfrm>
           <a:prstGeom prst="rect">
@@ -8532,42 +8040,18 @@
         </p:blipFill>
         <p:spPr>
           <a:xfrm>
-            <a:off x="5386299" y="1708065"/>
-            <a:ext cx="1267002" cy="863685"/>
+            <a:off x="5278349" y="2007040"/>
+            <a:ext cx="658901" cy="609685"/>
           </a:xfrm>
           <a:prstGeom prst="rect">
             <a:avLst/>
           </a:prstGeom>
-        </p:spPr>
-      </p:pic>
-      <p:pic>
-        <p:nvPicPr>
-          <p:cNvPr id="10" name="Picture 9">
-            <a:extLst>
-              <a:ext uri="{FF2B5EF4-FFF2-40B4-BE49-F238E27FC236}">
-                <a16:creationId xmlns:a16="http://schemas.microsoft.com/office/drawing/2014/main" id="{82581E22-CF10-1FB8-8DB2-8538A0B73F87}"/>
-              </a:ext>
-            </a:extLst>
-          </p:cNvPr>
-          <p:cNvPicPr>
-            <a:picLocks noChangeAspect="1"/>
-          </p:cNvPicPr>
-          <p:nvPr/>
-        </p:nvPicPr>
-        <p:blipFill>
-          <a:blip r:embed="rId4"/>
-          <a:stretch>
-            <a:fillRect/>
-          </a:stretch>
-        </p:blipFill>
-        <p:spPr>
-          <a:xfrm>
-            <a:off x="5222875" y="1568450"/>
-            <a:ext cx="1593850" cy="1627324"/>
-          </a:xfrm>
-          <a:prstGeom prst="rect">
-            <a:avLst/>
-          </a:prstGeom>
+          <a:effectLst>
+            <a:glow>
+              <a:srgbClr val="68361A"/>
+            </a:glow>
+            <a:softEdge rad="190500"/>
+          </a:effectLst>
         </p:spPr>
       </p:pic>
     </p:spTree>
@@ -8704,8 +8188,8 @@
         </p:blipFill>
         <p:spPr>
           <a:xfrm>
-            <a:off x="-199000" y="-54775"/>
-            <a:ext cx="9343000" cy="5270776"/>
+            <a:off x="-21588" y="-54775"/>
+            <a:ext cx="9144000" cy="5198275"/>
           </a:xfrm>
           <a:prstGeom prst="rect">
             <a:avLst/>
@@ -8716,6 +8200,58 @@
           </a:ln>
         </p:spPr>
       </p:pic>
+      <p:sp>
+        <p:nvSpPr>
+          <p:cNvPr id="3" name="Rectangle 2">
+            <a:extLst>
+              <a:ext uri="{FF2B5EF4-FFF2-40B4-BE49-F238E27FC236}">
+                <a16:creationId xmlns:a16="http://schemas.microsoft.com/office/drawing/2014/main" id="{CC949149-A7B0-3A30-ED32-491462F11CD4}"/>
+              </a:ext>
+            </a:extLst>
+          </p:cNvPr>
+          <p:cNvSpPr/>
+          <p:nvPr/>
+        </p:nvSpPr>
+        <p:spPr>
+          <a:xfrm>
+            <a:off x="311700" y="4463329"/>
+            <a:ext cx="991964" cy="470291"/>
+          </a:xfrm>
+          <a:prstGeom prst="rect">
+            <a:avLst/>
+          </a:prstGeom>
+          <a:solidFill>
+            <a:srgbClr val="191919"/>
+          </a:solidFill>
+          <a:ln>
+            <a:noFill/>
+          </a:ln>
+        </p:spPr>
+        <p:style>
+          <a:lnRef idx="2">
+            <a:schemeClr val="accent1">
+              <a:shade val="15000"/>
+            </a:schemeClr>
+          </a:lnRef>
+          <a:fillRef idx="1">
+            <a:schemeClr val="accent1"/>
+          </a:fillRef>
+          <a:effectRef idx="0">
+            <a:schemeClr val="accent1"/>
+          </a:effectRef>
+          <a:fontRef idx="minor">
+            <a:schemeClr val="lt1"/>
+          </a:fontRef>
+        </p:style>
+        <p:txBody>
+          <a:bodyPr rtlCol="0" anchor="ctr"/>
+          <a:lstStyle/>
+          <a:p>
+            <a:pPr algn="ctr"/>
+            <a:endParaRPr lang="en-IN" dirty="0"/>
+          </a:p>
+        </p:txBody>
+      </p:sp>
     </p:spTree>
   </p:cSld>
   <p:clrMapOvr>
@@ -9305,7 +8841,7 @@
   <p:cSld>
     <p:spTree>
       <p:nvGrpSpPr>
-        <p:cNvPr id="1" name="Shape 95"/>
+        <p:cNvPr id="1" name="Shape 102"/>
         <p:cNvGrpSpPr/>
         <p:nvPr/>
       </p:nvGrpSpPr>
@@ -9319,7 +8855,7 @@
       </p:grpSpPr>
       <p:sp>
         <p:nvSpPr>
-          <p:cNvPr id="96" name="Google Shape;96;p19"/>
+          <p:cNvPr id="103" name="Google Shape;103;p20"/>
           <p:cNvSpPr txBox="1">
             <a:spLocks noGrp="1"/>
           </p:cNvSpPr>
@@ -9357,7 +8893,7 @@
       </p:sp>
       <p:sp>
         <p:nvSpPr>
-          <p:cNvPr id="97" name="Google Shape;97;p19"/>
+          <p:cNvPr id="104" name="Google Shape;104;p20"/>
           <p:cNvSpPr txBox="1">
             <a:spLocks noGrp="1"/>
           </p:cNvSpPr>
@@ -9395,7 +8931,7 @@
       </p:sp>
       <p:pic>
         <p:nvPicPr>
-          <p:cNvPr id="98" name="Google Shape;98;p19"/>
+          <p:cNvPr id="105" name="Google Shape;105;p20"/>
           <p:cNvPicPr preferRelativeResize="0"/>
           <p:nvPr/>
         </p:nvPicPr>
@@ -9409,8 +8945,8 @@
         </p:blipFill>
         <p:spPr>
           <a:xfrm>
-            <a:off x="0" y="-41325"/>
-            <a:ext cx="9143999" cy="5298600"/>
+            <a:off x="0" y="0"/>
+            <a:ext cx="9144001" cy="5143500"/>
           </a:xfrm>
           <a:prstGeom prst="rect">
             <a:avLst/>
@@ -9419,36 +8955,6 @@
           <a:ln>
             <a:noFill/>
           </a:ln>
-        </p:spPr>
-      </p:pic>
-      <p:pic>
-        <p:nvPicPr>
-          <p:cNvPr id="4" name="Picture 3">
-            <a:extLst>
-              <a:ext uri="{FF2B5EF4-FFF2-40B4-BE49-F238E27FC236}">
-                <a16:creationId xmlns:a16="http://schemas.microsoft.com/office/drawing/2014/main" id="{5EC2B100-C1E3-9010-C662-B607B48588A2}"/>
-              </a:ext>
-            </a:extLst>
-          </p:cNvPr>
-          <p:cNvPicPr>
-            <a:picLocks noChangeAspect="1"/>
-          </p:cNvPicPr>
-          <p:nvPr/>
-        </p:nvPicPr>
-        <p:blipFill>
-          <a:blip r:embed="rId4"/>
-          <a:stretch>
-            <a:fillRect/>
-          </a:stretch>
-        </p:blipFill>
-        <p:spPr>
-          <a:xfrm>
-            <a:off x="5304811" y="2461107"/>
-            <a:ext cx="873740" cy="840893"/>
-          </a:xfrm>
-          <a:prstGeom prst="rect">
-            <a:avLst/>
-          </a:prstGeom>
         </p:spPr>
       </p:pic>
     </p:spTree>
@@ -9476,7 +8982,7 @@
   <p:cSld>
     <p:spTree>
       <p:nvGrpSpPr>
-        <p:cNvPr id="1" name="Shape 102"/>
+        <p:cNvPr id="1" name="Shape 109"/>
         <p:cNvGrpSpPr/>
         <p:nvPr/>
       </p:nvGrpSpPr>
@@ -9490,7 +8996,7 @@
       </p:grpSpPr>
       <p:sp>
         <p:nvSpPr>
-          <p:cNvPr id="103" name="Google Shape;103;p20"/>
+          <p:cNvPr id="110" name="Google Shape;110;p21"/>
           <p:cNvSpPr txBox="1">
             <a:spLocks noGrp="1"/>
           </p:cNvSpPr>
@@ -9528,7 +9034,7 @@
       </p:sp>
       <p:sp>
         <p:nvSpPr>
-          <p:cNvPr id="104" name="Google Shape;104;p20"/>
+          <p:cNvPr id="111" name="Google Shape;111;p21"/>
           <p:cNvSpPr txBox="1">
             <a:spLocks noGrp="1"/>
           </p:cNvSpPr>
@@ -9566,7 +9072,7 @@
       </p:sp>
       <p:pic>
         <p:nvPicPr>
-          <p:cNvPr id="105" name="Google Shape;105;p20"/>
+          <p:cNvPr id="112" name="Google Shape;112;p21"/>
           <p:cNvPicPr preferRelativeResize="0"/>
           <p:nvPr/>
         </p:nvPicPr>
@@ -9581,7 +9087,7 @@
         <p:spPr>
           <a:xfrm>
             <a:off x="0" y="0"/>
-            <a:ext cx="9144001" cy="5143500"/>
+            <a:ext cx="9144001" cy="5143499"/>
           </a:xfrm>
           <a:prstGeom prst="rect">
             <a:avLst/>
@@ -9617,7 +9123,7 @@
   <p:cSld>
     <p:spTree>
       <p:nvGrpSpPr>
-        <p:cNvPr id="1" name="Shape 109"/>
+        <p:cNvPr id="1" name="Shape 123"/>
         <p:cNvGrpSpPr/>
         <p:nvPr/>
       </p:nvGrpSpPr>
@@ -9631,7 +9137,7 @@
       </p:grpSpPr>
       <p:sp>
         <p:nvSpPr>
-          <p:cNvPr id="110" name="Google Shape;110;p21"/>
+          <p:cNvPr id="124" name="Google Shape;124;p23"/>
           <p:cNvSpPr txBox="1">
             <a:spLocks noGrp="1"/>
           </p:cNvSpPr>
@@ -9669,7 +9175,7 @@
       </p:sp>
       <p:sp>
         <p:nvSpPr>
-          <p:cNvPr id="111" name="Google Shape;111;p21"/>
+          <p:cNvPr id="125" name="Google Shape;125;p23"/>
           <p:cNvSpPr txBox="1">
             <a:spLocks noGrp="1"/>
           </p:cNvSpPr>
@@ -9707,7 +9213,7 @@
       </p:sp>
       <p:pic>
         <p:nvPicPr>
-          <p:cNvPr id="112" name="Google Shape;112;p21"/>
+          <p:cNvPr id="126" name="Google Shape;126;p23"/>
           <p:cNvPicPr preferRelativeResize="0"/>
           <p:nvPr/>
         </p:nvPicPr>
@@ -9721,8 +9227,8 @@
         </p:blipFill>
         <p:spPr>
           <a:xfrm>
-            <a:off x="0" y="0"/>
-            <a:ext cx="9144001" cy="5143499"/>
+            <a:off x="0" y="-84725"/>
+            <a:ext cx="9144001" cy="5228225"/>
           </a:xfrm>
           <a:prstGeom prst="rect">
             <a:avLst/>
